--- a/entregas/posts/site/kit/editavel/efeito-rebote-seg-26-10.pptx
+++ b/entregas/posts/site/kit/editavel/efeito-rebote-seg-26-10.pptx
@@ -4071,7 +4071,7 @@
         </p:nvSpPr>
         <p:spPr>
           <a:xfrm>
-            <a:off x="915442" y="4166387"/>
+            <a:off x="915442" y="4105488"/>
             <a:ext cx="3212247" cy="304495"/>
           </a:xfrm>
           <a:prstGeom prst="rect">
@@ -4097,13 +4097,13 @@
               </a:spcAft>
             </a:pPr>
             <a:r>
-              <a:rPr b="0" i="0" sz="2397" lang="pt-BR">
+              <a:rPr b="1" i="0" sz="2397" lang="pt-BR">
                 <a:solidFill>
                   <a:srgbClr val="E9C46A"/>
                 </a:solidFill>
-                <a:latin typeface="Barlow SemiBold"/>
-                <a:ea typeface="Barlow SemiBold"/>
-                <a:cs typeface="Barlow SemiBold"/>
+                <a:latin typeface="Barlow"/>
+                <a:ea typeface="Barlow"/>
+                <a:cs typeface="Barlow"/>
               </a:rPr>
               <a:t>Arrecadação de itens</a:t>
             </a:r>
@@ -4118,7 +4118,7 @@
         </p:nvSpPr>
         <p:spPr>
           <a:xfrm>
-            <a:off x="915442" y="4921833"/>
+            <a:off x="915442" y="4645732"/>
             <a:ext cx="8640410" cy="3689747"/>
           </a:xfrm>
           <a:prstGeom prst="rect">
@@ -4189,7 +4189,7 @@
         </p:nvSpPr>
         <p:spPr>
           <a:xfrm>
-            <a:off x="915442" y="8795275"/>
+            <a:off x="915442" y="8835292"/>
             <a:ext cx="6017053" cy="1040427"/>
           </a:xfrm>
           <a:prstGeom prst="rect">
@@ -4236,7 +4236,7 @@
         </p:nvSpPr>
         <p:spPr>
           <a:xfrm>
-            <a:off x="915442" y="11515488"/>
+            <a:off x="915442" y="11496457"/>
             <a:ext cx="1210717" cy="437712"/>
           </a:xfrm>
           <a:prstGeom prst="rect">
@@ -4814,7 +4814,7 @@
         </p:nvSpPr>
         <p:spPr>
           <a:xfrm>
-            <a:off x="915442" y="1079840"/>
+            <a:off x="915442" y="1018941"/>
             <a:ext cx="990198" cy="304495"/>
           </a:xfrm>
           <a:prstGeom prst="rect">
@@ -4840,13 +4840,13 @@
               </a:spcAft>
             </a:pPr>
             <a:r>
-              <a:rPr b="0" i="0" sz="2397" lang="pt-BR">
+              <a:rPr b="1" i="0" sz="2397" lang="pt-BR">
                 <a:solidFill>
                   <a:srgbClr val="B5121B"/>
                 </a:solidFill>
-                <a:latin typeface="Barlow SemiBold"/>
-                <a:ea typeface="Barlow SemiBold"/>
-                <a:cs typeface="Barlow SemiBold"/>
+                <a:latin typeface="Barlow"/>
+                <a:ea typeface="Barlow"/>
+                <a:cs typeface="Barlow"/>
               </a:rPr>
               <a:t>A lista</a:t>
             </a:r>
@@ -4861,7 +4861,7 @@
         </p:nvSpPr>
         <p:spPr>
           <a:xfrm>
-            <a:off x="915442" y="1973730"/>
+            <a:off x="915442" y="1764163"/>
             <a:ext cx="4792221" cy="933524"/>
           </a:xfrm>
           <a:prstGeom prst="rect">
@@ -4908,7 +4908,7 @@
         </p:nvSpPr>
         <p:spPr>
           <a:xfrm>
-            <a:off x="1488378" y="3354610"/>
+            <a:off x="1488378" y="3584010"/>
             <a:ext cx="195218" cy="686143"/>
           </a:xfrm>
           <a:prstGeom prst="rect">
@@ -4955,7 +4955,7 @@
         </p:nvSpPr>
         <p:spPr>
           <a:xfrm>
-            <a:off x="2175867" y="3529439"/>
+            <a:off x="2175867" y="3569455"/>
             <a:ext cx="4290283" cy="520214"/>
           </a:xfrm>
           <a:prstGeom prst="rect">
@@ -5002,7 +5002,7 @@
         </p:nvSpPr>
         <p:spPr>
           <a:xfrm>
-            <a:off x="1456283" y="4819376"/>
+            <a:off x="1456283" y="5048776"/>
             <a:ext cx="259556" cy="686143"/>
           </a:xfrm>
           <a:prstGeom prst="rect">
@@ -5049,7 +5049,7 @@
         </p:nvSpPr>
         <p:spPr>
           <a:xfrm>
-            <a:off x="2175867" y="4994205"/>
+            <a:off x="2175867" y="5034221"/>
             <a:ext cx="4942344" cy="520214"/>
           </a:xfrm>
           <a:prstGeom prst="rect">
@@ -5096,7 +5096,7 @@
         </p:nvSpPr>
         <p:spPr>
           <a:xfrm>
-            <a:off x="1456618" y="6461248"/>
+            <a:off x="1456618" y="6690648"/>
             <a:ext cx="258738" cy="686143"/>
           </a:xfrm>
           <a:prstGeom prst="rect">
@@ -5143,7 +5143,7 @@
         </p:nvSpPr>
         <p:spPr>
           <a:xfrm>
-            <a:off x="2175867" y="6376074"/>
+            <a:off x="2175867" y="6416090"/>
             <a:ext cx="6706797" cy="1040427"/>
           </a:xfrm>
           <a:prstGeom prst="rect">
@@ -5190,7 +5190,7 @@
         </p:nvSpPr>
         <p:spPr>
           <a:xfrm>
-            <a:off x="1446624" y="8103120"/>
+            <a:off x="1446624" y="8332520"/>
             <a:ext cx="278874" cy="686143"/>
           </a:xfrm>
           <a:prstGeom prst="rect">
@@ -5237,7 +5237,7 @@
         </p:nvSpPr>
         <p:spPr>
           <a:xfrm>
-            <a:off x="2175867" y="8277949"/>
+            <a:off x="2175867" y="8317965"/>
             <a:ext cx="6426711" cy="520214"/>
           </a:xfrm>
           <a:prstGeom prst="rect">
@@ -5284,7 +5284,7 @@
         </p:nvSpPr>
         <p:spPr>
           <a:xfrm>
-            <a:off x="1455963" y="9744992"/>
+            <a:off x="1455963" y="9974392"/>
             <a:ext cx="260047" cy="686143"/>
           </a:xfrm>
           <a:prstGeom prst="rect">
@@ -5331,7 +5331,7 @@
         </p:nvSpPr>
         <p:spPr>
           <a:xfrm>
-            <a:off x="2175867" y="9659818"/>
+            <a:off x="2175867" y="9699834"/>
             <a:ext cx="5899925" cy="1040427"/>
           </a:xfrm>
           <a:prstGeom prst="rect">
@@ -5378,7 +5378,7 @@
         </p:nvSpPr>
         <p:spPr>
           <a:xfrm>
-            <a:off x="915442" y="11515488"/>
+            <a:off x="915442" y="11496457"/>
             <a:ext cx="4522262" cy="437712"/>
           </a:xfrm>
           <a:prstGeom prst="rect">
@@ -5622,7 +5622,7 @@
         </p:nvSpPr>
         <p:spPr>
           <a:xfrm>
-            <a:off x="915442" y="1079840"/>
+            <a:off x="915442" y="1018941"/>
             <a:ext cx="1306651" cy="304495"/>
           </a:xfrm>
           <a:prstGeom prst="rect">
@@ -5648,13 +5648,13 @@
               </a:spcAft>
             </a:pPr>
             <a:r>
-              <a:rPr b="0" i="0" sz="2397" lang="pt-BR">
+              <a:rPr b="1" i="0" sz="2397" lang="pt-BR">
                 <a:solidFill>
                   <a:srgbClr val="B5121B"/>
                 </a:solidFill>
-                <a:latin typeface="Barlow SemiBold"/>
-                <a:ea typeface="Barlow SemiBold"/>
-                <a:cs typeface="Barlow SemiBold"/>
+                <a:latin typeface="Barlow"/>
+                <a:ea typeface="Barlow"/>
+                <a:cs typeface="Barlow"/>
               </a:rPr>
               <a:t>Atenção</a:t>
             </a:r>
@@ -5669,7 +5669,7 @@
         </p:nvSpPr>
         <p:spPr>
           <a:xfrm>
-            <a:off x="915442" y="4125338"/>
+            <a:off x="915442" y="3915771"/>
             <a:ext cx="6870859" cy="2800573"/>
           </a:xfrm>
           <a:prstGeom prst="rect">
@@ -5740,7 +5740,7 @@
         </p:nvSpPr>
         <p:spPr>
           <a:xfrm>
-            <a:off x="915442" y="7156067"/>
+            <a:off x="915442" y="7228097"/>
             <a:ext cx="7519696" cy="1656681"/>
           </a:xfrm>
           <a:prstGeom prst="rect">
@@ -5787,7 +5787,7 @@
         </p:nvSpPr>
         <p:spPr>
           <a:xfrm>
-            <a:off x="915442" y="11515488"/>
+            <a:off x="915442" y="11496457"/>
             <a:ext cx="2501250" cy="437712"/>
           </a:xfrm>
           <a:prstGeom prst="rect">
@@ -6217,7 +6217,7 @@
         </p:nvSpPr>
         <p:spPr>
           <a:xfrm>
-            <a:off x="915442" y="1079840"/>
+            <a:off x="915442" y="1018941"/>
             <a:ext cx="2529900" cy="304495"/>
           </a:xfrm>
           <a:prstGeom prst="rect">
@@ -6243,13 +6243,13 @@
               </a:spcAft>
             </a:pPr>
             <a:r>
-              <a:rPr b="0" i="0" sz="2397" lang="pt-BR">
+              <a:rPr b="1" i="0" sz="2397" lang="pt-BR">
                 <a:solidFill>
                   <a:srgbClr val="B5121B"/>
                 </a:solidFill>
-                <a:latin typeface="Barlow SemiBold"/>
-                <a:ea typeface="Barlow SemiBold"/>
-                <a:cs typeface="Barlow SemiBold"/>
+                <a:latin typeface="Barlow"/>
+                <a:ea typeface="Barlow"/>
+                <a:cs typeface="Barlow"/>
               </a:rPr>
               <a:t>Como doar certo</a:t>
             </a:r>
@@ -6264,7 +6264,7 @@
         </p:nvSpPr>
         <p:spPr>
           <a:xfrm>
-            <a:off x="915442" y="3438496"/>
+            <a:off x="915442" y="3228929"/>
             <a:ext cx="4476750" cy="933524"/>
           </a:xfrm>
           <a:prstGeom prst="rect">
@@ -6311,7 +6311,7 @@
         </p:nvSpPr>
         <p:spPr>
           <a:xfrm>
-            <a:off x="1488378" y="4819376"/>
+            <a:off x="1488378" y="5048776"/>
             <a:ext cx="195218" cy="686143"/>
           </a:xfrm>
           <a:prstGeom prst="rect">
@@ -6358,7 +6358,7 @@
         </p:nvSpPr>
         <p:spPr>
           <a:xfrm>
-            <a:off x="2175867" y="4994205"/>
+            <a:off x="2175867" y="5034221"/>
             <a:ext cx="7066984" cy="520214"/>
           </a:xfrm>
           <a:prstGeom prst="rect">
@@ -6405,7 +6405,7 @@
         </p:nvSpPr>
         <p:spPr>
           <a:xfrm>
-            <a:off x="1456283" y="6461248"/>
+            <a:off x="1456283" y="6690648"/>
             <a:ext cx="259556" cy="686143"/>
           </a:xfrm>
           <a:prstGeom prst="rect">
@@ -6452,7 +6452,7 @@
         </p:nvSpPr>
         <p:spPr>
           <a:xfrm>
-            <a:off x="2175867" y="6376074"/>
+            <a:off x="2175867" y="6416090"/>
             <a:ext cx="7274576" cy="1040427"/>
           </a:xfrm>
           <a:prstGeom prst="rect">
@@ -6499,7 +6499,7 @@
         </p:nvSpPr>
         <p:spPr>
           <a:xfrm>
-            <a:off x="1456618" y="8280225"/>
+            <a:off x="1456618" y="8509625"/>
             <a:ext cx="258738" cy="686143"/>
           </a:xfrm>
           <a:prstGeom prst="rect">
@@ -6546,7 +6546,7 @@
         </p:nvSpPr>
         <p:spPr>
           <a:xfrm>
-            <a:off x="2175867" y="8195051"/>
+            <a:off x="2175867" y="8235068"/>
             <a:ext cx="6878172" cy="1040427"/>
           </a:xfrm>
           <a:prstGeom prst="rect">
@@ -6593,7 +6593,7 @@
         </p:nvSpPr>
         <p:spPr>
           <a:xfrm>
-            <a:off x="915442" y="11515488"/>
+            <a:off x="915442" y="11496457"/>
             <a:ext cx="1849517" cy="437712"/>
           </a:xfrm>
           <a:prstGeom prst="rect">
@@ -6721,7 +6721,7 @@
         </p:nvSpPr>
         <p:spPr>
           <a:xfrm>
-            <a:off x="4385890" y="5430830"/>
+            <a:off x="4385890" y="5369931"/>
             <a:ext cx="1515219" cy="304495"/>
           </a:xfrm>
           <a:prstGeom prst="rect">
@@ -6747,13 +6747,13 @@
               </a:spcAft>
             </a:pPr>
             <a:r>
-              <a:rPr b="0" i="0" sz="2397" lang="pt-BR">
+              <a:rPr b="1" i="0" sz="2397" lang="pt-BR">
                 <a:solidFill>
                   <a:srgbClr val="E9C46A"/>
                 </a:solidFill>
-                <a:latin typeface="Barlow SemiBold"/>
-                <a:ea typeface="Barlow SemiBold"/>
-                <a:cs typeface="Barlow SemiBold"/>
+                <a:latin typeface="Barlow"/>
+                <a:ea typeface="Barlow"/>
+                <a:cs typeface="Barlow"/>
               </a:rPr>
               <a:t>Na quarta</a:t>
             </a:r>
@@ -6768,7 +6768,7 @@
         </p:nvSpPr>
         <p:spPr>
           <a:xfrm>
-            <a:off x="1132790" y="6199556"/>
+            <a:off x="1132790" y="5989989"/>
             <a:ext cx="8021419" cy="1867049"/>
           </a:xfrm>
           <a:prstGeom prst="rect">
@@ -6827,7 +6827,7 @@
         </p:nvSpPr>
         <p:spPr>
           <a:xfrm>
-            <a:off x="958766" y="8670860"/>
+            <a:off x="958766" y="8572105"/>
             <a:ext cx="8369469" cy="493776"/>
           </a:xfrm>
           <a:prstGeom prst="rect">
